--- a/data/outputs/v2/Grade11/Biology/Quizzes/SS2.2_Growth_and_Development_in_Plants/Biology_G11_SS2.2_Growth_and_Development_in_Plants_L1_QuickCheck.pptx
+++ b/data/outputs/v2/Grade11/Biology/Quizzes/SS2.2_Growth_and_Development_in_Plants/Biology_G11_SS2.2_Growth_and_Development_in_Plants_L1_QuickCheck.pptx
@@ -1698,7 +1698,7 @@
                 <a:ea typeface="Arial" pitchFamily="34" charset="-122"/>
                 <a:cs typeface="Arial" pitchFamily="34" charset="-120"/>
               </a:rPr>
-              <a:t>Lesson 1: The Farmer's Puzzle: Why Do Maize and Beans Behave Differently After the Same Rain?</a:t>
+              <a:t>Lesson 1: Meeting the Phenomenon: Mr. Wafula's Maize and Beans</a:t>
             </a:r>
             <a:endParaRPr lang="en-US" sz="2000" dirty="0"/>
           </a:p>
@@ -1982,7 +1982,7 @@
                 <a:ea typeface="Arial" pitchFamily="34" charset="-122"/>
                 <a:cs typeface="Arial" pitchFamily="34" charset="-120"/>
               </a:rPr>
-              <a:t>Use after: Predict phase</a:t>
+              <a:t>Use after: Observe phase</a:t>
             </a:r>
             <a:endParaRPr lang="en-US" sz="1100" dirty="0"/>
           </a:p>
@@ -2013,7 +2013,7 @@
               <a:buNone/>
             </a:pPr>
             <a:r>
-              <a:rPr lang="en-US" sz="1800" b="1" dirty="0">
+              <a:rPr lang="en-US" sz="2000" b="1" dirty="0">
                 <a:solidFill>
                   <a:srgbClr val="FFFFFF"/>
                 </a:solidFill>
@@ -2021,9 +2021,9 @@
                 <a:ea typeface="Arial" pitchFamily="34" charset="-122"/>
                 <a:cs typeface="Arial" pitchFamily="34" charset="-120"/>
               </a:rPr>
-              <a:t>Mama Wanjiru in Molo plants maize and beans on the same morning after the first heavy rains. The seeds all look healthy. After one week, which description matches what the story says she found?</a:t>
-            </a:r>
-            <a:endParaRPr lang="en-US" sz="1800" dirty="0"/>
+              <a:t>On Mr. Wafula's farm near Kitale, 100 bean seeds were planted. By Day 14, 80 of them had germinated. How many bean seeds had NOT germinated by Day 14?</a:t>
+            </a:r>
+            <a:endParaRPr lang="en-US" sz="2000" dirty="0"/>
           </a:p>
         </p:txBody>
       </p:sp>
@@ -2121,7 +2121,7 @@
                 <a:ea typeface="Arial" pitchFamily="34" charset="-122"/>
                 <a:cs typeface="Arial" pitchFamily="34" charset="-120"/>
               </a:rPr>
-              <a:t>All the seeds came up on the same day</a:t>
+              <a:t>8</a:t>
             </a:r>
             <a:endParaRPr lang="en-US" sz="1700" dirty="0"/>
           </a:p>
@@ -2221,7 +2221,7 @@
                 <a:ea typeface="Arial" pitchFamily="34" charset="-122"/>
                 <a:cs typeface="Arial" pitchFamily="34" charset="-120"/>
               </a:rPr>
-              <a:t>Every healthy-looking seed had sprouted</a:t>
+              <a:t>80</a:t>
             </a:r>
             <a:endParaRPr lang="en-US" sz="1700" dirty="0"/>
           </a:p>
@@ -2321,7 +2321,7 @@
                 <a:ea typeface="Arial" pitchFamily="34" charset="-122"/>
                 <a:cs typeface="Arial" pitchFamily="34" charset="-120"/>
               </a:rPr>
-              <a:t>Only the beans came up and every maize seed failed</a:t>
+              <a:t>20</a:t>
             </a:r>
             <a:endParaRPr lang="en-US" sz="1700" dirty="0"/>
           </a:p>
@@ -2421,7 +2421,7 @@
                 <a:ea typeface="Arial" pitchFamily="34" charset="-122"/>
                 <a:cs typeface="Arial" pitchFamily="34" charset="-120"/>
               </a:rPr>
-              <a:t>Some seeds had sprouted, some were late, and a few had not come up at all</a:t>
+              <a:t>12</a:t>
             </a:r>
             <a:endParaRPr lang="en-US" sz="1700" dirty="0"/>
           </a:p>
@@ -2631,7 +2631,7 @@
                 <a:ea typeface="Arial" pitchFamily="34" charset="-122"/>
                 <a:cs typeface="Arial" pitchFamily="34" charset="-120"/>
               </a:rPr>
-              <a:t>While watching a time-lapse of a bean seed growing in soil, four learners wrote notes. Which note is a specific observation, something you can actually see, and not a guess or an explanation?</a:t>
+              <a:t>In the time-lapse records, the bean radicle appeared on Day 3 and the bean shoot came above the soil on Day 8. The maize radicle appeared on Day 4 and the maize shoot came above the soil on Day 7. Which statement matches these records?</a:t>
             </a:r>
             <a:endParaRPr lang="en-US" sz="1800" dirty="0"/>
           </a:p>
@@ -2731,7 +2731,7 @@
                 <a:ea typeface="Arial" pitchFamily="34" charset="-122"/>
                 <a:cs typeface="Arial" pitchFamily="34" charset="-120"/>
               </a:rPr>
-              <a:t>The bean seed needs warmth to wake up.</a:t>
+              <a:t>Maize was first for both the radicle and the shoot above soil</a:t>
             </a:r>
             <a:endParaRPr lang="en-US" sz="1700" dirty="0"/>
           </a:p>
@@ -2831,7 +2831,7 @@
                 <a:ea typeface="Arial" pitchFamily="34" charset="-122"/>
                 <a:cs typeface="Arial" pitchFamily="34" charset="-120"/>
               </a:rPr>
-              <a:t>Maize and beans grow in exactly the same way.</a:t>
+              <a:t>Both crops had their radicle and shoot above soil on the same days</a:t>
             </a:r>
             <a:endParaRPr lang="en-US" sz="1700" dirty="0"/>
           </a:p>
@@ -2931,7 +2931,7 @@
                 <a:ea typeface="Arial" pitchFamily="34" charset="-122"/>
                 <a:cs typeface="Arial" pitchFamily="34" charset="-120"/>
               </a:rPr>
-              <a:t>The bean stem was bent like a hook as it came above the soil.</a:t>
+              <a:t>The bean radicle appeared first, but the maize shoot came above the soil first</a:t>
             </a:r>
             <a:endParaRPr lang="en-US" sz="1700" dirty="0"/>
           </a:p>
@@ -3031,7 +3031,7 @@
                 <a:ea typeface="Arial" pitchFamily="34" charset="-122"/>
                 <a:cs typeface="Arial" pitchFamily="34" charset="-120"/>
               </a:rPr>
-              <a:t>The plant grew.</a:t>
+              <a:t>Bean was first for both the radicle and the shoot above soil</a:t>
             </a:r>
             <a:endParaRPr lang="en-US" sz="1700" dirty="0"/>
           </a:p>
@@ -3241,7 +3241,7 @@
                 <a:ea typeface="Arial" pitchFamily="34" charset="-122"/>
                 <a:cs typeface="Arial" pitchFamily="34" charset="-120"/>
               </a:rPr>
-              <a:t>In the time-lapse videos, learners were asked to watch which part of the seedling came out first. Which statement is an 'I wonder' statement rather than an 'I notice' statement?</a:t>
+              <a:t>A group is studying the bean time-lapse. Their table shows the radicle appeared on Day 3 and the shoot came above the soil on Day 8. What can they say about the bean seed on Day 5?</a:t>
             </a:r>
             <a:endParaRPr lang="en-US" sz="2000" dirty="0"/>
           </a:p>
@@ -3333,7 +3333,7 @@
               <a:buNone/>
             </a:pPr>
             <a:r>
-              <a:rPr lang="en-US" sz="1700" dirty="0">
+              <a:rPr lang="en-US" sz="1500" dirty="0">
                 <a:solidFill>
                   <a:srgbClr val="FFFFFF"/>
                 </a:solidFill>
@@ -3341,9 +3341,9 @@
                 <a:ea typeface="Arial" pitchFamily="34" charset="-122"/>
                 <a:cs typeface="Arial" pitchFamily="34" charset="-120"/>
               </a:rPr>
-              <a:t>I notice that the maize leaf was rolled up.</a:t>
-            </a:r>
-            <a:endParaRPr lang="en-US" sz="1700" dirty="0"/>
+              <a:t>It had not germinated yet because no shoot was above the soil</a:t>
+            </a:r>
+            <a:endParaRPr lang="en-US" sz="1500" dirty="0"/>
           </a:p>
         </p:txBody>
       </p:sp>
@@ -3433,7 +3433,7 @@
               <a:buNone/>
             </a:pPr>
             <a:r>
-              <a:rPr lang="en-US" sz="1700" dirty="0">
+              <a:rPr lang="en-US" sz="1500" dirty="0">
                 <a:solidFill>
                   <a:srgbClr val="FFFFFF"/>
                 </a:solidFill>
@@ -3441,9 +3441,9 @@
                 <a:ea typeface="Arial" pitchFamily="34" charset="-122"/>
                 <a:cs typeface="Arial" pitchFamily="34" charset="-120"/>
               </a:rPr>
-              <a:t>I wonder why some seeds that looked healthy did not sprout.</a:t>
-            </a:r>
-            <a:endParaRPr lang="en-US" sz="1700" dirty="0"/>
+              <a:t>It had failed to germinate because nothing was visible above the soil</a:t>
+            </a:r>
+            <a:endParaRPr lang="en-US" sz="1500" dirty="0"/>
           </a:p>
         </p:txBody>
       </p:sp>
@@ -3533,7 +3533,7 @@
               <a:buNone/>
             </a:pPr>
             <a:r>
-              <a:rPr lang="en-US" sz="1700" dirty="0">
+              <a:rPr lang="en-US" sz="1500" dirty="0">
                 <a:solidFill>
                   <a:srgbClr val="FFFFFF"/>
                 </a:solidFill>
@@ -3541,9 +3541,9 @@
                 <a:ea typeface="Arial" pitchFamily="34" charset="-122"/>
                 <a:cs typeface="Arial" pitchFamily="34" charset="-120"/>
               </a:rPr>
-              <a:t>I notice that some seeds did not sprout.</a:t>
-            </a:r>
-            <a:endParaRPr lang="en-US" sz="1700" dirty="0"/>
+              <a:t>It had both germinated and emerged</a:t>
+            </a:r>
+            <a:endParaRPr lang="en-US" sz="1500" dirty="0"/>
           </a:p>
         </p:txBody>
       </p:sp>
@@ -3633,7 +3633,7 @@
               <a:buNone/>
             </a:pPr>
             <a:r>
-              <a:rPr lang="en-US" sz="1700" dirty="0">
+              <a:rPr lang="en-US" sz="1500" dirty="0">
                 <a:solidFill>
                   <a:srgbClr val="FFFFFF"/>
                 </a:solidFill>
@@ -3641,9 +3641,9 @@
                 <a:ea typeface="Arial" pitchFamily="34" charset="-122"/>
                 <a:cs typeface="Arial" pitchFamily="34" charset="-120"/>
               </a:rPr>
-              <a:t>I notice that the root grew down into the soil.</a:t>
-            </a:r>
-            <a:endParaRPr lang="en-US" sz="1700" dirty="0"/>
+              <a:t>It had germinated because the radicle had appeared, but it had not yet emerged above the soil</a:t>
+            </a:r>
+            <a:endParaRPr lang="en-US" sz="1500" dirty="0"/>
           </a:p>
         </p:txBody>
       </p:sp>
@@ -3812,7 +3812,7 @@
                 <a:ea typeface="Arial" pitchFamily="34" charset="-122"/>
                 <a:cs typeface="Arial" pitchFamily="34" charset="-120"/>
               </a:rPr>
-              <a:t>Use after: Explain phase</a:t>
+              <a:t>Use after: Observe phase</a:t>
             </a:r>
             <a:endParaRPr lang="en-US" sz="1100" dirty="0"/>
           </a:p>
@@ -3843,7 +3843,7 @@
               <a:buNone/>
             </a:pPr>
             <a:r>
-              <a:rPr lang="en-US" sz="2000" b="1" dirty="0">
+              <a:rPr lang="en-US" sz="2300" b="1" dirty="0">
                 <a:solidFill>
                   <a:srgbClr val="FFFFFF"/>
                 </a:solidFill>
@@ -3851,9 +3851,9 @@
                 <a:ea typeface="Arial" pitchFamily="34" charset="-122"/>
                 <a:cs typeface="Arial" pitchFamily="34" charset="-120"/>
               </a:rPr>
-              <a:t>Your teacher says your first drawn model of a maize seed and a bean seed will not be marked right or wrong, and you will keep it in a folder. What is the main reason for this?</a:t>
-            </a:r>
-            <a:endParaRPr lang="en-US" sz="2000" dirty="0"/>
+              <a:t>Learners watched a bean plant for 25 days. Which observation shows that plant growth is more than just getting taller?</a:t>
+            </a:r>
+            <a:endParaRPr lang="en-US" sz="2300" dirty="0"/>
           </a:p>
         </p:txBody>
       </p:sp>
@@ -3943,7 +3943,7 @@
               <a:buNone/>
             </a:pPr>
             <a:r>
-              <a:rPr lang="en-US" sz="1500" dirty="0">
+              <a:rPr lang="en-US" sz="1700" dirty="0">
                 <a:solidFill>
                   <a:srgbClr val="FFFFFF"/>
                 </a:solidFill>
@@ -3951,9 +3951,9 @@
                 <a:ea typeface="Arial" pitchFamily="34" charset="-122"/>
                 <a:cs typeface="Arial" pitchFamily="34" charset="-120"/>
               </a:rPr>
-              <a:t>It shows your starting ideas, so you can compare them with your improved ideas at the end of the unit</a:t>
-            </a:r>
-            <a:endParaRPr lang="en-US" sz="1500" dirty="0"/>
+              <a:t>Maize was taller than beans from Day 14 onward</a:t>
+            </a:r>
+            <a:endParaRPr lang="en-US" sz="1700" dirty="0"/>
           </a:p>
         </p:txBody>
       </p:sp>
@@ -4043,7 +4043,7 @@
               <a:buNone/>
             </a:pPr>
             <a:r>
-              <a:rPr lang="en-US" sz="1500" dirty="0">
+              <a:rPr lang="en-US" sz="1700" dirty="0">
                 <a:solidFill>
                   <a:srgbClr val="FFFFFF"/>
                 </a:solidFill>
@@ -4051,9 +4051,9 @@
                 <a:ea typeface="Arial" pitchFamily="34" charset="-122"/>
                 <a:cs typeface="Arial" pitchFamily="34" charset="-120"/>
               </a:rPr>
-              <a:t>It will be used to give each learner a final grade for the term</a:t>
-            </a:r>
-            <a:endParaRPr lang="en-US" sz="1500" dirty="0"/>
+              <a:t>The stem became thicker and the bean plant developed branches by Day 25</a:t>
+            </a:r>
+            <a:endParaRPr lang="en-US" sz="1700" dirty="0"/>
           </a:p>
         </p:txBody>
       </p:sp>
@@ -4143,7 +4143,7 @@
               <a:buNone/>
             </a:pPr>
             <a:r>
-              <a:rPr lang="en-US" sz="1500" dirty="0">
+              <a:rPr lang="en-US" sz="1700" dirty="0">
                 <a:solidFill>
                   <a:srgbClr val="FFFFFF"/>
                 </a:solidFill>
@@ -4151,9 +4151,9 @@
                 <a:ea typeface="Arial" pitchFamily="34" charset="-122"/>
                 <a:cs typeface="Arial" pitchFamily="34" charset="-120"/>
               </a:rPr>
-              <a:t>Only learners who draw the correct model are allowed to continue</a:t>
-            </a:r>
-            <a:endParaRPr lang="en-US" sz="1500" dirty="0"/>
+              <a:t>More maize seeds than bean seeds germinated by Day 14</a:t>
+            </a:r>
+            <a:endParaRPr lang="en-US" sz="1700" dirty="0"/>
           </a:p>
         </p:txBody>
       </p:sp>
@@ -4243,7 +4243,7 @@
               <a:buNone/>
             </a:pPr>
             <a:r>
-              <a:rPr lang="en-US" sz="1500" dirty="0">
+              <a:rPr lang="en-US" sz="1700" dirty="0">
                 <a:solidFill>
                   <a:srgbClr val="FFFFFF"/>
                 </a:solidFill>
@@ -4251,9 +4251,9 @@
                 <a:ea typeface="Arial" pitchFamily="34" charset="-122"/>
                 <a:cs typeface="Arial" pitchFamily="34" charset="-120"/>
               </a:rPr>
-              <a:t>The teacher already knows that every first model is wrong and will discard them</a:t>
-            </a:r>
-            <a:endParaRPr lang="en-US" sz="1500" dirty="0"/>
+              <a:t>The bean radicle appeared on Day 3</a:t>
+            </a:r>
+            <a:endParaRPr lang="en-US" sz="1700" dirty="0"/>
           </a:p>
         </p:txBody>
       </p:sp>
@@ -4453,7 +4453,7 @@
               <a:buNone/>
             </a:pPr>
             <a:r>
-              <a:rPr lang="en-US" sz="2000" b="1" dirty="0">
+              <a:rPr lang="en-US" sz="1800" b="1" dirty="0">
                 <a:solidFill>
                   <a:srgbClr val="FFFFFF"/>
                 </a:solidFill>
@@ -4461,9 +4461,9 @@
                 <a:ea typeface="Arial" pitchFamily="34" charset="-122"/>
                 <a:cs typeface="Arial" pitchFamily="34" charset="-120"/>
               </a:rPr>
-              <a:t>On Day 1 of the unit, a learner asks: 'Why did some of Mama Wanjiru's healthy-looking seeds not germinate?' Which is the best response at this stage of learning?</a:t>
-            </a:r>
-            <a:endParaRPr lang="en-US" sz="2000" dirty="0"/>
+              <a:t>Mr. Wafula planted maize and beans on the same day, 3 cm deep, after 25 mm of rain, in the same field. Some healthy-looking seeds did not germinate. At the end of this first lesson, which statement is the most honest one?</a:t>
+            </a:r>
+            <a:endParaRPr lang="en-US" sz="1800" dirty="0"/>
           </a:p>
         </p:txBody>
       </p:sp>
@@ -4553,7 +4553,7 @@
               <a:buNone/>
             </a:pPr>
             <a:r>
-              <a:rPr lang="en-US" sz="1500" dirty="0">
+              <a:rPr lang="en-US" sz="1700" dirty="0">
                 <a:solidFill>
                   <a:srgbClr val="FFFFFF"/>
                 </a:solidFill>
@@ -4561,9 +4561,9 @@
                 <a:ea typeface="Arial" pitchFamily="34" charset="-122"/>
                 <a:cs typeface="Arial" pitchFamily="34" charset="-120"/>
               </a:rPr>
-              <a:t>Only the biggest seeds germinate, so the small ones failed.</a:t>
-            </a:r>
-            <a:endParaRPr lang="en-US" sz="1500" dirty="0"/>
+              <a:t>Healthy-looking seeds that fail must have been damaged by pests</a:t>
+            </a:r>
+            <a:endParaRPr lang="en-US" sz="1700" dirty="0"/>
           </a:p>
         </p:txBody>
       </p:sp>
@@ -4653,7 +4653,7 @@
               <a:buNone/>
             </a:pPr>
             <a:r>
-              <a:rPr lang="en-US" sz="1500" dirty="0">
+              <a:rPr lang="en-US" sz="1700" dirty="0">
                 <a:solidFill>
                   <a:srgbClr val="FFFFFF"/>
                 </a:solidFill>
@@ -4661,9 +4661,9 @@
                 <a:ea typeface="Arial" pitchFamily="34" charset="-122"/>
                 <a:cs typeface="Arial" pitchFamily="34" charset="-120"/>
               </a:rPr>
-              <a:t>Healthy-looking seeds always germinate, so the farmer must have counted wrongly.</a:t>
-            </a:r>
-            <a:endParaRPr lang="en-US" sz="1500" dirty="0"/>
+              <a:t>The seeds failed because they were planted too deep</a:t>
+            </a:r>
+            <a:endParaRPr lang="en-US" sz="1700" dirty="0"/>
           </a:p>
         </p:txBody>
       </p:sp>
@@ -4753,7 +4753,7 @@
               <a:buNone/>
             </a:pPr>
             <a:r>
-              <a:rPr lang="en-US" sz="1500" dirty="0">
+              <a:rPr lang="en-US" sz="1700" dirty="0">
                 <a:solidFill>
                   <a:srgbClr val="FFFFFF"/>
                 </a:solidFill>
@@ -4761,9 +4761,9 @@
                 <a:ea typeface="Arial" pitchFamily="34" charset="-122"/>
                 <a:cs typeface="Arial" pitchFamily="34" charset="-120"/>
               </a:rPr>
-              <a:t>It has not been explained yet, so it goes on the Driving Question Board to investigate with evidence.</a:t>
-            </a:r>
-            <a:endParaRPr lang="en-US" sz="1500" dirty="0"/>
+              <a:t>We do not yet know the reason; it is a question we need to investigate</a:t>
+            </a:r>
+            <a:endParaRPr lang="en-US" sz="1700" dirty="0"/>
           </a:p>
         </p:txBody>
       </p:sp>
@@ -4853,7 +4853,7 @@
               <a:buNone/>
             </a:pPr>
             <a:r>
-              <a:rPr lang="en-US" sz="1500" dirty="0">
+              <a:rPr lang="en-US" sz="1700" dirty="0">
                 <a:solidFill>
                   <a:srgbClr val="FFFFFF"/>
                 </a:solidFill>
@@ -4861,9 +4861,9 @@
                 <a:ea typeface="Arial" pitchFamily="34" charset="-122"/>
                 <a:cs typeface="Arial" pitchFamily="34" charset="-120"/>
               </a:rPr>
-              <a:t>Seeds need only water, so the rain should have made every seed germinate.</a:t>
-            </a:r>
-            <a:endParaRPr lang="en-US" sz="1500" dirty="0"/>
+              <a:t>The seeds failed because beans need more water than maize</a:t>
+            </a:r>
+            <a:endParaRPr lang="en-US" sz="1700" dirty="0"/>
           </a:p>
         </p:txBody>
       </p:sp>
@@ -5071,7 +5071,7 @@
                 <a:ea typeface="Arial" pitchFamily="34" charset="-122"/>
                 <a:cs typeface="Arial" pitchFamily="34" charset="-120"/>
               </a:rPr>
-              <a:t>A group wants to post a question on the Driving Question Board about maize and beans. Which question is the best one to investigate?</a:t>
+              <a:t>Groups are writing questions for the Driving Question Board about Mr. Wafula's maize and beans. Which question is written in a way that could be investigated?</a:t>
             </a:r>
             <a:endParaRPr lang="en-US" sz="2000" dirty="0"/>
           </a:p>
@@ -5163,7 +5163,7 @@
               <a:buNone/>
             </a:pPr>
             <a:r>
-              <a:rPr lang="en-US" sz="1700" dirty="0">
+              <a:rPr lang="en-US" sz="1500" dirty="0">
                 <a:solidFill>
                   <a:srgbClr val="FFFFFF"/>
                 </a:solidFill>
@@ -5171,9 +5171,9 @@
                 <a:ea typeface="Arial" pitchFamily="34" charset="-122"/>
                 <a:cs typeface="Arial" pitchFamily="34" charset="-120"/>
               </a:rPr>
-              <a:t>How does maize grow differently from beans?</a:t>
-            </a:r>
-            <a:endParaRPr lang="en-US" sz="1700" dirty="0"/>
+              <a:t>Is farming a hard job?</a:t>
+            </a:r>
+            <a:endParaRPr lang="en-US" sz="1500" dirty="0"/>
           </a:p>
         </p:txBody>
       </p:sp>
@@ -5263,7 +5263,7 @@
               <a:buNone/>
             </a:pPr>
             <a:r>
-              <a:rPr lang="en-US" sz="1700" dirty="0">
+              <a:rPr lang="en-US" sz="1500" dirty="0">
                 <a:solidFill>
                   <a:srgbClr val="FFFFFF"/>
                 </a:solidFill>
@@ -5271,9 +5271,9 @@
                 <a:ea typeface="Arial" pitchFamily="34" charset="-122"/>
                 <a:cs typeface="Arial" pitchFamily="34" charset="-120"/>
               </a:rPr>
-              <a:t>Is maize good?</a:t>
-            </a:r>
-            <a:endParaRPr lang="en-US" sz="1700" dirty="0"/>
+              <a:t>Why is maize better than beans?</a:t>
+            </a:r>
+            <a:endParaRPr lang="en-US" sz="1500" dirty="0"/>
           </a:p>
         </p:txBody>
       </p:sp>
@@ -5363,7 +5363,7 @@
               <a:buNone/>
             </a:pPr>
             <a:r>
-              <a:rPr lang="en-US" sz="1700" dirty="0">
+              <a:rPr lang="en-US" sz="1500" dirty="0">
                 <a:solidFill>
                   <a:srgbClr val="FFFFFF"/>
                 </a:solidFill>
@@ -5371,9 +5371,9 @@
                 <a:ea typeface="Arial" pitchFamily="34" charset="-122"/>
                 <a:cs typeface="Arial" pitchFamily="34" charset="-120"/>
               </a:rPr>
-              <a:t>Is Mama Wanjiru a good farmer?</a:t>
-            </a:r>
-            <a:endParaRPr lang="en-US" sz="1700" dirty="0"/>
+              <a:t>Who planted the seeds first?</a:t>
+            </a:r>
+            <a:endParaRPr lang="en-US" sz="1500" dirty="0"/>
           </a:p>
         </p:txBody>
       </p:sp>
@@ -5463,7 +5463,7 @@
               <a:buNone/>
             </a:pPr>
             <a:r>
-              <a:rPr lang="en-US" sz="1700" dirty="0">
+              <a:rPr lang="en-US" sz="1500" dirty="0">
                 <a:solidFill>
                   <a:srgbClr val="FFFFFF"/>
                 </a:solidFill>
@@ -5471,9 +5471,9 @@
                 <a:ea typeface="Arial" pitchFamily="34" charset="-122"/>
                 <a:cs typeface="Arial" pitchFamily="34" charset="-120"/>
               </a:rPr>
-              <a:t>Did it rain in Molo?</a:t>
-            </a:r>
-            <a:endParaRPr lang="en-US" sz="1700" dirty="0"/>
+              <a:t>Does the amount of water given to bean seeds change how many of them germinate by Day 14?</a:t>
+            </a:r>
+            <a:endParaRPr lang="en-US" sz="1500" dirty="0"/>
           </a:p>
         </p:txBody>
       </p:sp>
@@ -5642,7 +5642,7 @@
                 <a:ea typeface="Arial" pitchFamily="34" charset="-122"/>
                 <a:cs typeface="Arial" pitchFamily="34" charset="-120"/>
               </a:rPr>
-              <a:t>Use after: End of lesson</a:t>
+              <a:t>Use after: Model Building phase</a:t>
             </a:r>
             <a:endParaRPr lang="en-US" sz="1100" dirty="0"/>
           </a:p>
@@ -5681,7 +5681,7 @@
                 <a:ea typeface="Arial" pitchFamily="34" charset="-122"/>
                 <a:cs typeface="Arial" pitchFamily="34" charset="-120"/>
               </a:rPr>
-              <a:t>Many groups asked whether growth and development are the same thing. Which question did the class agree to investigate first in the next lesson?</a:t>
+              <a:t>For an exit ticket, a learner must write an observation, not an explanation, about Mr. Wafula's crops. Which statement is an observation?</a:t>
             </a:r>
             <a:endParaRPr lang="en-US" sz="2000" dirty="0"/>
           </a:p>
@@ -5781,7 +5781,7 @@
                 <a:ea typeface="Arial" pitchFamily="34" charset="-122"/>
                 <a:cs typeface="Arial" pitchFamily="34" charset="-120"/>
               </a:rPr>
-              <a:t>Why is the rainfall heavy in Nakuru County?</a:t>
+              <a:t>Some seeds failed because the bean seed has less food inside</a:t>
             </a:r>
             <a:endParaRPr lang="en-US" sz="1700" dirty="0"/>
           </a:p>
@@ -5881,7 +5881,7 @@
                 <a:ea typeface="Arial" pitchFamily="34" charset="-122"/>
                 <a:cs typeface="Arial" pitchFamily="34" charset="-120"/>
               </a:rPr>
-              <a:t>What is growth and development?</a:t>
+              <a:t>Maize emerged above the soil on Day 7 and beans on Day 8</a:t>
             </a:r>
             <a:endParaRPr lang="en-US" sz="1700" dirty="0"/>
           </a:p>
@@ -5981,7 +5981,7 @@
                 <a:ea typeface="Arial" pitchFamily="34" charset="-122"/>
                 <a:cs typeface="Arial" pitchFamily="34" charset="-120"/>
               </a:rPr>
-              <a:t>Which fertiliser is best for maize?</a:t>
+              <a:t>Maize emerged first because it is stronger than beans</a:t>
             </a:r>
             <a:endParaRPr lang="en-US" sz="1700" dirty="0"/>
           </a:p>
@@ -6081,7 +6081,7 @@
                 <a:ea typeface="Arial" pitchFamily="34" charset="-122"/>
                 <a:cs typeface="Arial" pitchFamily="34" charset="-120"/>
               </a:rPr>
-              <a:t>How do plants make their own food?</a:t>
+              <a:t>Beans need more water to germinate</a:t>
             </a:r>
             <a:endParaRPr lang="en-US" sz="1700" dirty="0"/>
           </a:p>
